--- a/docs/update_052523.pptx
+++ b/docs/update_052523.pptx
@@ -5,7 +5,7 @@
     <p:sldMasterId id="2147483713" r:id="rId1"/>
   </p:sldMasterIdLst>
   <p:notesMasterIdLst>
-    <p:notesMasterId r:id="rId15"/>
+    <p:notesMasterId r:id="rId16"/>
   </p:notesMasterIdLst>
   <p:sldIdLst>
     <p:sldId id="335" r:id="rId2"/>
@@ -19,8 +19,9 @@
     <p:sldId id="342" r:id="rId10"/>
     <p:sldId id="344" r:id="rId11"/>
     <p:sldId id="345" r:id="rId12"/>
-    <p:sldId id="346" r:id="rId13"/>
-    <p:sldId id="347" r:id="rId14"/>
+    <p:sldId id="348" r:id="rId13"/>
+    <p:sldId id="346" r:id="rId14"/>
+    <p:sldId id="347" r:id="rId15"/>
   </p:sldIdLst>
   <p:sldSz cx="12192000" cy="6858000"/>
   <p:notesSz cx="6858000" cy="9144000"/>
@@ -209,7 +210,7 @@
           <a:p>
             <a:fld id="{5D91BF4D-3201-F745-B932-E7F786B71255}" type="datetimeFigureOut">
               <a:rPr lang="en-US" smtClean="0"/>
-              <a:t>5/25/23</a:t>
+              <a:t>5/26/23</a:t>
             </a:fld>
             <a:endParaRPr lang="en-US"/>
           </a:p>
@@ -476,6 +477,145 @@
 </p:notesMaster>
 </file>
 
+<file path=ppt/notesSlides/notesSlide1.xml><?xml version="1.0" encoding="utf-8"?>
+<p:notes xmlns:a="http://schemas.openxmlformats.org/drawingml/2006/main" xmlns:r="http://schemas.openxmlformats.org/officeDocument/2006/relationships" xmlns:p="http://schemas.openxmlformats.org/presentationml/2006/main">
+  <p:cSld>
+    <p:spTree>
+      <p:nvGrpSpPr>
+        <p:cNvPr id="1" name=""/>
+        <p:cNvGrpSpPr/>
+        <p:nvPr/>
+      </p:nvGrpSpPr>
+      <p:grpSpPr>
+        <a:xfrm>
+          <a:off x="0" y="0"/>
+          <a:ext cx="0" cy="0"/>
+          <a:chOff x="0" y="0"/>
+          <a:chExt cx="0" cy="0"/>
+        </a:xfrm>
+      </p:grpSpPr>
+      <p:sp>
+        <p:nvSpPr>
+          <p:cNvPr id="2" name="Slide Image Placeholder 1"/>
+          <p:cNvSpPr>
+            <a:spLocks noGrp="1" noRot="1" noChangeAspect="1"/>
+          </p:cNvSpPr>
+          <p:nvPr>
+            <p:ph type="sldImg"/>
+          </p:nvPr>
+        </p:nvSpPr>
+        <p:spPr/>
+      </p:sp>
+      <p:sp>
+        <p:nvSpPr>
+          <p:cNvPr id="3" name="Notes Placeholder 2"/>
+          <p:cNvSpPr>
+            <a:spLocks noGrp="1"/>
+          </p:cNvSpPr>
+          <p:nvPr>
+            <p:ph type="body" idx="1"/>
+          </p:nvPr>
+        </p:nvSpPr>
+        <p:spPr/>
+        <p:txBody>
+          <a:bodyPr/>
+          <a:lstStyle/>
+          <a:p>
+            <a:pPr algn="just"/>
+            <a:r>
+              <a:rPr lang="en-US" sz="1200" dirty="0"/>
+              <a:t>GO ontologies and annotations were downloaded using the </a:t>
+            </a:r>
+            <a:r>
+              <a:rPr lang="en-US" sz="1200" dirty="0" err="1"/>
+              <a:t>goatools.base.download</a:t>
+            </a:r>
+            <a:r>
+              <a:rPr lang="en-US" sz="1200" dirty="0"/>
+              <a:t> go basic obo and </a:t>
+            </a:r>
+            <a:r>
+              <a:rPr lang="en-US" sz="1200" dirty="0" err="1"/>
+              <a:t>goatools.base.download</a:t>
+            </a:r>
+            <a:r>
+              <a:rPr lang="en-US" sz="1200" dirty="0"/>
+              <a:t> </a:t>
+            </a:r>
+            <a:r>
+              <a:rPr lang="en-US" sz="1200" dirty="0" err="1"/>
+              <a:t>ncbi</a:t>
+            </a:r>
+            <a:r>
+              <a:rPr lang="en-US" sz="1200" dirty="0"/>
+              <a:t> associations functions. Ontologies were then loaded in using the </a:t>
+            </a:r>
+            <a:r>
+              <a:rPr lang="en-US" sz="1200" dirty="0" err="1"/>
+              <a:t>goatools.obo</a:t>
+            </a:r>
+            <a:r>
+              <a:rPr lang="en-US" sz="1200" dirty="0"/>
+              <a:t> </a:t>
+            </a:r>
+            <a:r>
+              <a:rPr lang="en-US" sz="1200" dirty="0" err="1"/>
+              <a:t>parser.GODag</a:t>
+            </a:r>
+            <a:r>
+              <a:rPr lang="en-US" sz="1200" dirty="0"/>
+              <a:t> function. Human GO associations were then selected and stored as a list of named tuples using the call ‘</a:t>
+            </a:r>
+            <a:r>
+              <a:rPr lang="en-US" sz="1200" dirty="0" err="1"/>
+              <a:t>taxids</a:t>
+            </a:r>
+            <a:r>
+              <a:rPr lang="en-US" sz="1200" dirty="0"/>
+              <a:t> = [9606]’ in the goatools.anno.genetogo_reader.Gene2GoReader function. </a:t>
+            </a:r>
+          </a:p>
+          <a:p>
+            <a:endParaRPr lang="en-US" dirty="0"/>
+          </a:p>
+        </p:txBody>
+      </p:sp>
+      <p:sp>
+        <p:nvSpPr>
+          <p:cNvPr id="4" name="Slide Number Placeholder 3"/>
+          <p:cNvSpPr>
+            <a:spLocks noGrp="1"/>
+          </p:cNvSpPr>
+          <p:nvPr>
+            <p:ph type="sldNum" sz="quarter" idx="5"/>
+          </p:nvPr>
+        </p:nvSpPr>
+        <p:spPr/>
+        <p:txBody>
+          <a:bodyPr/>
+          <a:lstStyle/>
+          <a:p>
+            <a:fld id="{5E3C3097-339F-D341-9AE2-47DB3DE0E34B}" type="slidenum">
+              <a:rPr lang="en-US" smtClean="0"/>
+              <a:t>4</a:t>
+            </a:fld>
+            <a:endParaRPr lang="en-US"/>
+          </a:p>
+        </p:txBody>
+      </p:sp>
+    </p:spTree>
+    <p:extLst>
+      <p:ext uri="{BB962C8B-B14F-4D97-AF65-F5344CB8AC3E}">
+        <p14:creationId xmlns:p14="http://schemas.microsoft.com/office/powerpoint/2010/main" val="1589300241"/>
+      </p:ext>
+    </p:extLst>
+  </p:cSld>
+  <p:clrMapOvr>
+    <a:masterClrMapping/>
+  </p:clrMapOvr>
+</p:notes>
+</file>
+
 <file path=ppt/slideLayouts/slideLayout1.xml><?xml version="1.0" encoding="utf-8"?>
 <p:sldLayout xmlns:a="http://schemas.openxmlformats.org/drawingml/2006/main" xmlns:r="http://schemas.openxmlformats.org/officeDocument/2006/relationships" xmlns:p="http://schemas.openxmlformats.org/presentationml/2006/main" type="title" preserve="1">
   <p:cSld name="Title Slide">
@@ -623,7 +763,7 @@
           <a:p>
             <a:fld id="{4D82D62B-C5BC-9A48-B649-B612C2626DF0}" type="datetime2">
               <a:rPr lang="en-US" smtClean="0"/>
-              <a:t>Thursday, May 25, 2023</a:t>
+              <a:t>Friday, May 26, 2023</a:t>
             </a:fld>
             <a:endParaRPr lang="en-US" dirty="0"/>
           </a:p>
@@ -826,7 +966,7 @@
           <a:p>
             <a:fld id="{8C7BF22D-4351-7443-9203-BE328953BFC7}" type="datetime2">
               <a:rPr lang="en-US" smtClean="0"/>
-              <a:t>Thursday, May 25, 2023</a:t>
+              <a:t>Friday, May 26, 2023</a:t>
             </a:fld>
             <a:endParaRPr lang="en-US"/>
           </a:p>
@@ -1037,7 +1177,7 @@
           <a:p>
             <a:fld id="{9FDF6349-9520-004C-B410-2193F9372E49}" type="datetime2">
               <a:rPr lang="en-US" smtClean="0"/>
-              <a:t>Thursday, May 25, 2023</a:t>
+              <a:t>Friday, May 26, 2023</a:t>
             </a:fld>
             <a:endParaRPr lang="en-US"/>
           </a:p>
@@ -1238,7 +1378,7 @@
           <a:p>
             <a:fld id="{E9A10DC3-F6B5-014A-A9AD-0D47C6506BAB}" type="datetime2">
               <a:rPr lang="en-US" smtClean="0"/>
-              <a:t>Thursday, May 25, 2023</a:t>
+              <a:t>Friday, May 26, 2023</a:t>
             </a:fld>
             <a:endParaRPr lang="en-US" dirty="0"/>
           </a:p>
@@ -1518,7 +1658,7 @@
           <a:p>
             <a:fld id="{A049C287-8CF4-DC48-88B8-6E35669697EC}" type="datetime2">
               <a:rPr lang="en-US" smtClean="0"/>
-              <a:t>Thursday, May 25, 2023</a:t>
+              <a:t>Friday, May 26, 2023</a:t>
             </a:fld>
             <a:endParaRPr lang="en-US"/>
           </a:p>
@@ -1788,7 +1928,7 @@
           <a:p>
             <a:fld id="{ADEB5C39-7764-3744-BF89-1BA0C95D9B94}" type="datetime2">
               <a:rPr lang="en-US" smtClean="0"/>
-              <a:t>Thursday, May 25, 2023</a:t>
+              <a:t>Friday, May 26, 2023</a:t>
             </a:fld>
             <a:endParaRPr lang="en-US"/>
           </a:p>
@@ -2203,7 +2343,7 @@
           <a:p>
             <a:fld id="{4BAB7099-C23E-1745-AF03-0B0C40F6AA6C}" type="datetime2">
               <a:rPr lang="en-US" smtClean="0"/>
-              <a:t>Thursday, May 25, 2023</a:t>
+              <a:t>Friday, May 26, 2023</a:t>
             </a:fld>
             <a:endParaRPr lang="en-US"/>
           </a:p>
@@ -2347,7 +2487,7 @@
           <a:p>
             <a:fld id="{52B883A0-F701-0F49-9D67-42F97F0F4C65}" type="datetime2">
               <a:rPr lang="en-US" smtClean="0"/>
-              <a:t>Thursday, May 25, 2023</a:t>
+              <a:t>Friday, May 26, 2023</a:t>
             </a:fld>
             <a:endParaRPr lang="en-US"/>
           </a:p>
@@ -2463,7 +2603,7 @@
           <a:p>
             <a:fld id="{E6923127-F9F8-8B4E-9CEB-95BF7FFEA85F}" type="datetime2">
               <a:rPr lang="en-US" smtClean="0"/>
-              <a:t>Thursday, May 25, 2023</a:t>
+              <a:t>Friday, May 26, 2023</a:t>
             </a:fld>
             <a:endParaRPr lang="en-US"/>
           </a:p>
@@ -2777,7 +2917,7 @@
           <a:p>
             <a:fld id="{24AFEB34-53E9-8F42-9ED2-04274EE70207}" type="datetime2">
               <a:rPr lang="en-US" smtClean="0"/>
-              <a:t>Thursday, May 25, 2023</a:t>
+              <a:t>Friday, May 26, 2023</a:t>
             </a:fld>
             <a:endParaRPr lang="en-US"/>
           </a:p>
@@ -3068,7 +3208,7 @@
           <a:p>
             <a:fld id="{78864A2C-3282-224A-8A3B-B1B48911DC1D}" type="datetime2">
               <a:rPr lang="en-US" smtClean="0"/>
-              <a:t>Thursday, May 25, 2023</a:t>
+              <a:t>Friday, May 26, 2023</a:t>
             </a:fld>
             <a:endParaRPr lang="en-US"/>
           </a:p>
@@ -3312,7 +3452,7 @@
           <a:p>
             <a:fld id="{6A398F71-50EE-C442-9A03-D3A19758747B}" type="datetime2">
               <a:rPr lang="en-US" smtClean="0"/>
-              <a:t>Thursday, May 25, 2023</a:t>
+              <a:t>Friday, May 26, 2023</a:t>
             </a:fld>
             <a:endParaRPr lang="en-US" dirty="0"/>
           </a:p>
@@ -4159,13 +4299,13 @@
           </p:spPr>
           <p:style>
             <a:lnRef idx="3">
-              <a:schemeClr val="accent6"/>
+              <a:schemeClr val="accent2"/>
             </a:lnRef>
             <a:fillRef idx="0">
-              <a:schemeClr val="accent6"/>
+              <a:schemeClr val="accent2"/>
             </a:fillRef>
             <a:effectRef idx="2">
-              <a:schemeClr val="accent6"/>
+              <a:schemeClr val="accent2"/>
             </a:effectRef>
             <a:fontRef idx="minor">
               <a:schemeClr val="tx1"/>
@@ -4197,13 +4337,13 @@
           </p:spPr>
           <p:style>
             <a:lnRef idx="3">
-              <a:schemeClr val="accent6"/>
+              <a:schemeClr val="accent2"/>
             </a:lnRef>
             <a:fillRef idx="0">
-              <a:schemeClr val="accent6"/>
+              <a:schemeClr val="accent2"/>
             </a:fillRef>
             <a:effectRef idx="2">
-              <a:schemeClr val="accent6"/>
+              <a:schemeClr val="accent2"/>
             </a:effectRef>
             <a:fontRef idx="minor">
               <a:schemeClr val="tx1"/>
@@ -4865,12 +5005,287 @@
           </a:p>
         </p:txBody>
       </p:sp>
+      <p:sp>
+        <p:nvSpPr>
+          <p:cNvPr id="9" name="TextBox 8">
+            <a:extLst>
+              <a:ext uri="{FF2B5EF4-FFF2-40B4-BE49-F238E27FC236}">
+                <a16:creationId xmlns:a16="http://schemas.microsoft.com/office/drawing/2014/main" id="{C06E25FD-82CE-DC4D-A9E0-F714EF28FA38}"/>
+              </a:ext>
+            </a:extLst>
+          </p:cNvPr>
+          <p:cNvSpPr txBox="1"/>
+          <p:nvPr/>
+        </p:nvSpPr>
+        <p:spPr>
+          <a:xfrm>
+            <a:off x="898057" y="2021974"/>
+            <a:ext cx="4632509" cy="369332"/>
+          </a:xfrm>
+          <a:prstGeom prst="rect">
+            <a:avLst/>
+          </a:prstGeom>
+          <a:noFill/>
+        </p:spPr>
+        <p:txBody>
+          <a:bodyPr wrap="square" rtlCol="0">
+            <a:spAutoFit/>
+          </a:bodyPr>
+          <a:lstStyle/>
+          <a:p>
+            <a:pPr marL="285750" indent="-285750">
+              <a:buFont typeface="Arial" panose="020B0604020202020204" pitchFamily="34" charset="0"/>
+              <a:buChar char="•"/>
+            </a:pPr>
+            <a:r>
+              <a:rPr lang="en-US" dirty="0"/>
+              <a:t>First we processed both files individually </a:t>
+            </a:r>
+          </a:p>
+        </p:txBody>
+      </p:sp>
+      <p:sp>
+        <p:nvSpPr>
+          <p:cNvPr id="10" name="TextBox 9">
+            <a:extLst>
+              <a:ext uri="{FF2B5EF4-FFF2-40B4-BE49-F238E27FC236}">
+                <a16:creationId xmlns:a16="http://schemas.microsoft.com/office/drawing/2014/main" id="{48E9BE6E-037B-FA4F-9890-D7D1D8158C0E}"/>
+              </a:ext>
+            </a:extLst>
+          </p:cNvPr>
+          <p:cNvSpPr txBox="1"/>
+          <p:nvPr/>
+        </p:nvSpPr>
+        <p:spPr>
+          <a:xfrm>
+            <a:off x="1323453" y="2941140"/>
+            <a:ext cx="4697120" cy="1200329"/>
+          </a:xfrm>
+          <a:prstGeom prst="rect">
+            <a:avLst/>
+          </a:prstGeom>
+          <a:noFill/>
+        </p:spPr>
+        <p:txBody>
+          <a:bodyPr wrap="none" rtlCol="0">
+            <a:spAutoFit/>
+          </a:bodyPr>
+          <a:lstStyle/>
+          <a:p>
+            <a:r>
+              <a:rPr lang="en-US" dirty="0">
+                <a:solidFill>
+                  <a:srgbClr val="1D1C1D"/>
+                </a:solidFill>
+                <a:latin typeface="Slack-Lato"/>
+              </a:rPr>
+              <a:t>Raw data number of proteins: </a:t>
+            </a:r>
+            <a:r>
+              <a:rPr lang="en-US" b="1" dirty="0">
+                <a:solidFill>
+                  <a:srgbClr val="1D1C1D"/>
+                </a:solidFill>
+                <a:latin typeface="Slack-Lato"/>
+              </a:rPr>
+              <a:t>1648</a:t>
+            </a:r>
+          </a:p>
+          <a:p>
+            <a:r>
+              <a:rPr lang="en-US" dirty="0">
+                <a:solidFill>
+                  <a:srgbClr val="1D1C1D"/>
+                </a:solidFill>
+                <a:latin typeface="Slack-Lato"/>
+              </a:rPr>
+              <a:t>Removed keratins: 22</a:t>
+            </a:r>
+          </a:p>
+          <a:p>
+            <a:r>
+              <a:rPr lang="en-US" dirty="0">
+                <a:solidFill>
+                  <a:srgbClr val="1D1C1D"/>
+                </a:solidFill>
+                <a:latin typeface="Slack-Lato"/>
+              </a:rPr>
+              <a:t>Proteins did not pass at least one condition: 417</a:t>
+            </a:r>
+          </a:p>
+          <a:p>
+            <a:r>
+              <a:rPr lang="en-US" dirty="0">
+                <a:solidFill>
+                  <a:srgbClr val="1D1C1D"/>
+                </a:solidFill>
+                <a:latin typeface="Slack-Lato"/>
+              </a:rPr>
+              <a:t>Proteins after filtering: </a:t>
+            </a:r>
+            <a:r>
+              <a:rPr lang="en-US" b="1" dirty="0">
+                <a:solidFill>
+                  <a:srgbClr val="1D1C1D"/>
+                </a:solidFill>
+                <a:latin typeface="Slack-Lato"/>
+              </a:rPr>
+              <a:t>1231</a:t>
+            </a:r>
+          </a:p>
+        </p:txBody>
+      </p:sp>
+      <p:sp>
+        <p:nvSpPr>
+          <p:cNvPr id="3" name="TextBox 2">
+            <a:extLst>
+              <a:ext uri="{FF2B5EF4-FFF2-40B4-BE49-F238E27FC236}">
+                <a16:creationId xmlns:a16="http://schemas.microsoft.com/office/drawing/2014/main" id="{7B33EE36-EBBD-EF4D-BF84-B226D4AFEB99}"/>
+              </a:ext>
+            </a:extLst>
+          </p:cNvPr>
+          <p:cNvSpPr txBox="1"/>
+          <p:nvPr/>
+        </p:nvSpPr>
+        <p:spPr>
+          <a:xfrm>
+            <a:off x="3024080" y="2664400"/>
+            <a:ext cx="647934" cy="369332"/>
+          </a:xfrm>
+          <a:prstGeom prst="rect">
+            <a:avLst/>
+          </a:prstGeom>
+          <a:noFill/>
+        </p:spPr>
+        <p:txBody>
+          <a:bodyPr wrap="none" rtlCol="0">
+            <a:spAutoFit/>
+          </a:bodyPr>
+          <a:lstStyle/>
+          <a:p>
+            <a:r>
+              <a:rPr lang="en-US" dirty="0"/>
+              <a:t>male</a:t>
+            </a:r>
+          </a:p>
+        </p:txBody>
+      </p:sp>
+      <p:sp>
+        <p:nvSpPr>
+          <p:cNvPr id="5" name="TextBox 4">
+            <a:extLst>
+              <a:ext uri="{FF2B5EF4-FFF2-40B4-BE49-F238E27FC236}">
+                <a16:creationId xmlns:a16="http://schemas.microsoft.com/office/drawing/2014/main" id="{984EAE81-AA30-EE49-A49B-30583B396416}"/>
+              </a:ext>
+            </a:extLst>
+          </p:cNvPr>
+          <p:cNvSpPr txBox="1"/>
+          <p:nvPr/>
+        </p:nvSpPr>
+        <p:spPr>
+          <a:xfrm>
+            <a:off x="8519988" y="2664400"/>
+            <a:ext cx="828112" cy="369332"/>
+          </a:xfrm>
+          <a:prstGeom prst="rect">
+            <a:avLst/>
+          </a:prstGeom>
+          <a:noFill/>
+        </p:spPr>
+        <p:txBody>
+          <a:bodyPr wrap="none" rtlCol="0">
+            <a:spAutoFit/>
+          </a:bodyPr>
+          <a:lstStyle/>
+          <a:p>
+            <a:r>
+              <a:rPr lang="en-US" dirty="0"/>
+              <a:t>female</a:t>
+            </a:r>
+          </a:p>
+        </p:txBody>
+      </p:sp>
+      <p:sp>
+        <p:nvSpPr>
+          <p:cNvPr id="6" name="TextBox 5">
+            <a:extLst>
+              <a:ext uri="{FF2B5EF4-FFF2-40B4-BE49-F238E27FC236}">
+                <a16:creationId xmlns:a16="http://schemas.microsoft.com/office/drawing/2014/main" id="{A06BBD08-D653-A546-A5E1-D51A151404C7}"/>
+              </a:ext>
+            </a:extLst>
+          </p:cNvPr>
+          <p:cNvSpPr txBox="1"/>
+          <p:nvPr/>
+        </p:nvSpPr>
+        <p:spPr>
+          <a:xfrm>
+            <a:off x="6828206" y="3033732"/>
+            <a:ext cx="4697120" cy="1200329"/>
+          </a:xfrm>
+          <a:prstGeom prst="rect">
+            <a:avLst/>
+          </a:prstGeom>
+          <a:noFill/>
+        </p:spPr>
+        <p:txBody>
+          <a:bodyPr wrap="none" rtlCol="0">
+            <a:spAutoFit/>
+          </a:bodyPr>
+          <a:lstStyle/>
+          <a:p>
+            <a:r>
+              <a:rPr lang="en-US" dirty="0">
+                <a:solidFill>
+                  <a:srgbClr val="1D1C1D"/>
+                </a:solidFill>
+                <a:latin typeface="Slack-Lato"/>
+              </a:rPr>
+              <a:t>Raw data number of proteins: </a:t>
+            </a:r>
+            <a:r>
+              <a:rPr lang="en-US" b="1" dirty="0"/>
+              <a:t>1518</a:t>
+            </a:r>
+          </a:p>
+          <a:p>
+            <a:r>
+              <a:rPr lang="en-US" dirty="0"/>
+              <a:t>Removed keratins: 20</a:t>
+            </a:r>
+          </a:p>
+          <a:p>
+            <a:r>
+              <a:rPr lang="en-US" dirty="0">
+                <a:solidFill>
+                  <a:srgbClr val="1D1C1D"/>
+                </a:solidFill>
+                <a:latin typeface="Slack-Lato"/>
+              </a:rPr>
+              <a:t>Proteins did not pass at least one condition</a:t>
+            </a:r>
+            <a:r>
+              <a:rPr lang="en-US" dirty="0"/>
+              <a:t>: 221</a:t>
+            </a:r>
+          </a:p>
+          <a:p>
+            <a:r>
+              <a:rPr lang="en-US" dirty="0"/>
+              <a:t>Proteins after filtering: </a:t>
+            </a:r>
+            <a:r>
+              <a:rPr lang="en-US" b="1" dirty="0"/>
+              <a:t>1297</a:t>
+            </a:r>
+          </a:p>
+        </p:txBody>
+      </p:sp>
       <p:pic>
         <p:nvPicPr>
-          <p:cNvPr id="8" name="Picture 7" descr="A picture containing text, screenshot, diagram, font&#10;&#10;Description automatically generated">
-            <a:extLst>
-              <a:ext uri="{FF2B5EF4-FFF2-40B4-BE49-F238E27FC236}">
-                <a16:creationId xmlns:a16="http://schemas.microsoft.com/office/drawing/2014/main" id="{B796ADE1-736F-D14E-BCF5-4F4976AA8493}"/>
+          <p:cNvPr id="11" name="Picture 10" descr="A screenshot of a graph&#10;&#10;Description automatically generated with low confidence">
+            <a:extLst>
+              <a:ext uri="{FF2B5EF4-FFF2-40B4-BE49-F238E27FC236}">
+                <a16:creationId xmlns:a16="http://schemas.microsoft.com/office/drawing/2014/main" id="{BC4F4D41-D81C-4840-9BE4-392184FFF01F}"/>
               </a:ext>
             </a:extLst>
           </p:cNvPr>
@@ -4887,174 +5302,44 @@
         </p:blipFill>
         <p:spPr>
           <a:xfrm>
-            <a:off x="5783356" y="2043952"/>
-            <a:ext cx="5353611" cy="4173071"/>
+            <a:off x="1568514" y="4229503"/>
+            <a:ext cx="3559065" cy="2372710"/>
           </a:xfrm>
           <a:prstGeom prst="rect">
             <a:avLst/>
           </a:prstGeom>
         </p:spPr>
       </p:pic>
-      <p:sp>
-        <p:nvSpPr>
-          <p:cNvPr id="9" name="TextBox 8">
-            <a:extLst>
-              <a:ext uri="{FF2B5EF4-FFF2-40B4-BE49-F238E27FC236}">
-                <a16:creationId xmlns:a16="http://schemas.microsoft.com/office/drawing/2014/main" id="{C06E25FD-82CE-DC4D-A9E0-F714EF28FA38}"/>
-              </a:ext>
-            </a:extLst>
-          </p:cNvPr>
-          <p:cNvSpPr txBox="1"/>
+      <p:pic>
+        <p:nvPicPr>
+          <p:cNvPr id="13" name="Picture 12" descr="A screenshot of a graph&#10;&#10;Description automatically generated with low confidence">
+            <a:extLst>
+              <a:ext uri="{FF2B5EF4-FFF2-40B4-BE49-F238E27FC236}">
+                <a16:creationId xmlns:a16="http://schemas.microsoft.com/office/drawing/2014/main" id="{C4620057-7643-AA40-A0FC-48D83CFD5342}"/>
+              </a:ext>
+            </a:extLst>
+          </p:cNvPr>
+          <p:cNvPicPr>
+            <a:picLocks noChangeAspect="1"/>
+          </p:cNvPicPr>
           <p:nvPr/>
-        </p:nvSpPr>
-        <p:spPr>
-          <a:xfrm>
-            <a:off x="959223" y="2796987"/>
-            <a:ext cx="4632509" cy="1477328"/>
+        </p:nvPicPr>
+        <p:blipFill>
+          <a:blip r:embed="rId3"/>
+          <a:stretch>
+            <a:fillRect/>
+          </a:stretch>
+        </p:blipFill>
+        <p:spPr>
+          <a:xfrm>
+            <a:off x="7287607" y="4229502"/>
+            <a:ext cx="3559067" cy="2372711"/>
           </a:xfrm>
           <a:prstGeom prst="rect">
             <a:avLst/>
           </a:prstGeom>
-          <a:noFill/>
-        </p:spPr>
-        <p:txBody>
-          <a:bodyPr wrap="square" rtlCol="0">
-            <a:spAutoFit/>
-          </a:bodyPr>
-          <a:lstStyle/>
-          <a:p>
-            <a:pPr marL="285750" indent="-285750">
-              <a:buFont typeface="Arial" panose="020B0604020202020204" pitchFamily="34" charset="0"/>
-              <a:buChar char="•"/>
-            </a:pPr>
-            <a:r>
-              <a:rPr lang="en-US" dirty="0"/>
-              <a:t>Each file was filtered and normalized</a:t>
-            </a:r>
-          </a:p>
-          <a:p>
-            <a:pPr marL="285750" indent="-285750">
-              <a:buFont typeface="Arial" panose="020B0604020202020204" pitchFamily="34" charset="0"/>
-              <a:buChar char="•"/>
-            </a:pPr>
-            <a:r>
-              <a:rPr lang="en-US" dirty="0"/>
-              <a:t>Only </a:t>
-            </a:r>
-            <a:r>
-              <a:rPr lang="en-US" dirty="0" err="1"/>
-              <a:t>cre</a:t>
-            </a:r>
-            <a:r>
-              <a:rPr lang="en-US" dirty="0"/>
-              <a:t>+ channels were used to calculate ratio per channel per protein </a:t>
-            </a:r>
-          </a:p>
-          <a:p>
-            <a:pPr marL="285750" indent="-285750">
-              <a:buFont typeface="Arial" panose="020B0604020202020204" pitchFamily="34" charset="0"/>
-              <a:buChar char="•"/>
-            </a:pPr>
-            <a:r>
-              <a:rPr lang="en-US" dirty="0"/>
-              <a:t>Then male and female files were merged </a:t>
-            </a:r>
-          </a:p>
-          <a:p>
-            <a:pPr marL="285750" indent="-285750">
-              <a:buFont typeface="Arial" panose="020B0604020202020204" pitchFamily="34" charset="0"/>
-              <a:buChar char="•"/>
-            </a:pPr>
-            <a:r>
-              <a:rPr lang="en-US" dirty="0"/>
-              <a:t>And PCA plot was created </a:t>
-            </a:r>
-          </a:p>
-        </p:txBody>
-      </p:sp>
-      <p:sp>
-        <p:nvSpPr>
-          <p:cNvPr id="10" name="TextBox 9">
-            <a:extLst>
-              <a:ext uri="{FF2B5EF4-FFF2-40B4-BE49-F238E27FC236}">
-                <a16:creationId xmlns:a16="http://schemas.microsoft.com/office/drawing/2014/main" id="{48E9BE6E-037B-FA4F-9890-D7D1D8158C0E}"/>
-              </a:ext>
-            </a:extLst>
-          </p:cNvPr>
-          <p:cNvSpPr txBox="1"/>
-          <p:nvPr/>
-        </p:nvSpPr>
-        <p:spPr>
-          <a:xfrm>
-            <a:off x="1055033" y="4778188"/>
-            <a:ext cx="3696268" cy="923330"/>
-          </a:xfrm>
-          <a:prstGeom prst="rect">
-            <a:avLst/>
-          </a:prstGeom>
-          <a:noFill/>
-        </p:spPr>
-        <p:txBody>
-          <a:bodyPr wrap="none" rtlCol="0">
-            <a:spAutoFit/>
-          </a:bodyPr>
-          <a:lstStyle/>
-          <a:p>
-            <a:r>
-              <a:rPr lang="en-US" dirty="0">
-                <a:solidFill>
-                  <a:srgbClr val="1D1C1D"/>
-                </a:solidFill>
-                <a:latin typeface="Slack-Lato"/>
-              </a:rPr>
-              <a:t>Proteins detected in male file: </a:t>
-            </a:r>
-            <a:r>
-              <a:rPr lang="en-US" b="0" i="0" dirty="0">
-                <a:solidFill>
-                  <a:srgbClr val="1D1C1D"/>
-                </a:solidFill>
-                <a:effectLst/>
-                <a:latin typeface="Slack-Lato"/>
-              </a:rPr>
-              <a:t>1231 </a:t>
-            </a:r>
-          </a:p>
-          <a:p>
-            <a:r>
-              <a:rPr lang="en-US" dirty="0">
-                <a:solidFill>
-                  <a:srgbClr val="1D1C1D"/>
-                </a:solidFill>
-                <a:latin typeface="Slack-Lato"/>
-              </a:rPr>
-              <a:t>Proteins detected in female file: </a:t>
-            </a:r>
-            <a:r>
-              <a:rPr lang="en-US" b="0" i="0" dirty="0">
-                <a:solidFill>
-                  <a:srgbClr val="1D1C1D"/>
-                </a:solidFill>
-                <a:effectLst/>
-                <a:latin typeface="Slack-Lato"/>
-              </a:rPr>
-              <a:t>1297</a:t>
-            </a:r>
-          </a:p>
-          <a:p>
-            <a:r>
-              <a:rPr lang="en-US" dirty="0">
-                <a:solidFill>
-                  <a:srgbClr val="1D1C1D"/>
-                </a:solidFill>
-                <a:latin typeface="Slack-Lato"/>
-              </a:rPr>
-              <a:t>Only ~300 overlap</a:t>
-            </a:r>
-            <a:endParaRPr lang="en-US" dirty="0"/>
-          </a:p>
-        </p:txBody>
-      </p:sp>
+        </p:spPr>
+      </p:pic>
     </p:spTree>
     <p:extLst>
       <p:ext uri="{BB962C8B-B14F-4D97-AF65-F5344CB8AC3E}">
@@ -5146,187 +5431,12 @@
           </a:p>
         </p:txBody>
       </p:sp>
-      <p:sp>
-        <p:nvSpPr>
-          <p:cNvPr id="9" name="TextBox 8">
-            <a:extLst>
-              <a:ext uri="{FF2B5EF4-FFF2-40B4-BE49-F238E27FC236}">
-                <a16:creationId xmlns:a16="http://schemas.microsoft.com/office/drawing/2014/main" id="{C06E25FD-82CE-DC4D-A9E0-F714EF28FA38}"/>
-              </a:ext>
-            </a:extLst>
-          </p:cNvPr>
-          <p:cNvSpPr txBox="1"/>
-          <p:nvPr/>
-        </p:nvSpPr>
-        <p:spPr>
-          <a:xfrm>
-            <a:off x="959223" y="2796987"/>
-            <a:ext cx="4632509" cy="1477328"/>
-          </a:xfrm>
-          <a:prstGeom prst="rect">
-            <a:avLst/>
-          </a:prstGeom>
-          <a:noFill/>
-        </p:spPr>
-        <p:txBody>
-          <a:bodyPr wrap="square" rtlCol="0">
-            <a:spAutoFit/>
-          </a:bodyPr>
-          <a:lstStyle/>
-          <a:p>
-            <a:pPr marL="285750" indent="-285750">
-              <a:buFont typeface="Arial" panose="020B0604020202020204" pitchFamily="34" charset="0"/>
-              <a:buChar char="•"/>
-            </a:pPr>
-            <a:r>
-              <a:rPr lang="en-US" dirty="0"/>
-              <a:t>Each file was filtered and normalized</a:t>
-            </a:r>
-          </a:p>
-          <a:p>
-            <a:pPr marL="285750" indent="-285750">
-              <a:buFont typeface="Arial" panose="020B0604020202020204" pitchFamily="34" charset="0"/>
-              <a:buChar char="•"/>
-            </a:pPr>
-            <a:r>
-              <a:rPr lang="en-US" dirty="0"/>
-              <a:t>Only </a:t>
-            </a:r>
-            <a:r>
-              <a:rPr lang="en-US" dirty="0" err="1"/>
-              <a:t>cre</a:t>
-            </a:r>
-            <a:r>
-              <a:rPr lang="en-US" dirty="0"/>
-              <a:t>+ channels were used to calculate ratio per channel per protein </a:t>
-            </a:r>
-          </a:p>
-          <a:p>
-            <a:pPr marL="285750" indent="-285750">
-              <a:buFont typeface="Arial" panose="020B0604020202020204" pitchFamily="34" charset="0"/>
-              <a:buChar char="•"/>
-            </a:pPr>
-            <a:r>
-              <a:rPr lang="en-US" dirty="0"/>
-              <a:t>Then male and female files were merged </a:t>
-            </a:r>
-          </a:p>
-          <a:p>
-            <a:pPr marL="285750" indent="-285750">
-              <a:buFont typeface="Arial" panose="020B0604020202020204" pitchFamily="34" charset="0"/>
-              <a:buChar char="•"/>
-            </a:pPr>
-            <a:r>
-              <a:rPr lang="en-US" dirty="0"/>
-              <a:t>And PCA plot was created </a:t>
-            </a:r>
-          </a:p>
-        </p:txBody>
-      </p:sp>
-      <p:sp>
-        <p:nvSpPr>
-          <p:cNvPr id="10" name="TextBox 9">
-            <a:extLst>
-              <a:ext uri="{FF2B5EF4-FFF2-40B4-BE49-F238E27FC236}">
-                <a16:creationId xmlns:a16="http://schemas.microsoft.com/office/drawing/2014/main" id="{48E9BE6E-037B-FA4F-9890-D7D1D8158C0E}"/>
-              </a:ext>
-            </a:extLst>
-          </p:cNvPr>
-          <p:cNvSpPr txBox="1"/>
-          <p:nvPr/>
-        </p:nvSpPr>
-        <p:spPr>
-          <a:xfrm>
-            <a:off x="1055033" y="4778188"/>
-            <a:ext cx="3696268" cy="1200329"/>
-          </a:xfrm>
-          <a:prstGeom prst="rect">
-            <a:avLst/>
-          </a:prstGeom>
-          <a:noFill/>
-        </p:spPr>
-        <p:txBody>
-          <a:bodyPr wrap="none" rtlCol="0">
-            <a:spAutoFit/>
-          </a:bodyPr>
-          <a:lstStyle/>
-          <a:p>
-            <a:r>
-              <a:rPr lang="en-US" dirty="0">
-                <a:solidFill>
-                  <a:srgbClr val="1D1C1D"/>
-                </a:solidFill>
-                <a:latin typeface="Slack-Lato"/>
-              </a:rPr>
-              <a:t>Proteins detected in male file: </a:t>
-            </a:r>
-            <a:r>
-              <a:rPr lang="en-US" b="0" i="0" dirty="0">
-                <a:solidFill>
-                  <a:srgbClr val="1D1C1D"/>
-                </a:solidFill>
-                <a:effectLst/>
-                <a:latin typeface="Slack-Lato"/>
-              </a:rPr>
-              <a:t>1231 </a:t>
-            </a:r>
-          </a:p>
-          <a:p>
-            <a:r>
-              <a:rPr lang="en-US" dirty="0">
-                <a:solidFill>
-                  <a:srgbClr val="1D1C1D"/>
-                </a:solidFill>
-                <a:latin typeface="Slack-Lato"/>
-              </a:rPr>
-              <a:t>Proteins detected in female file: </a:t>
-            </a:r>
-            <a:r>
-              <a:rPr lang="en-US" b="0" i="0" dirty="0">
-                <a:solidFill>
-                  <a:srgbClr val="1D1C1D"/>
-                </a:solidFill>
-                <a:effectLst/>
-                <a:latin typeface="Slack-Lato"/>
-              </a:rPr>
-              <a:t>1297</a:t>
-            </a:r>
-          </a:p>
-          <a:p>
-            <a:r>
-              <a:rPr lang="en-US" dirty="0">
-                <a:solidFill>
-                  <a:srgbClr val="1D1C1D"/>
-                </a:solidFill>
-                <a:latin typeface="Slack-Lato"/>
-              </a:rPr>
-              <a:t>Only ~300 overlap</a:t>
-            </a:r>
-          </a:p>
-          <a:p>
-            <a:r>
-              <a:rPr lang="en-US" dirty="0">
-                <a:solidFill>
-                  <a:srgbClr val="FF0000"/>
-                </a:solidFill>
-                <a:latin typeface="Slack-Lato"/>
-              </a:rPr>
-              <a:t>And 170 overlap after ROC </a:t>
-            </a:r>
-            <a:endParaRPr lang="en-US" dirty="0">
-              <a:solidFill>
-                <a:srgbClr val="FF0000"/>
-              </a:solidFill>
-            </a:endParaRPr>
-          </a:p>
-        </p:txBody>
-      </p:sp>
       <p:pic>
         <p:nvPicPr>
-          <p:cNvPr id="5" name="Picture 4" descr="A picture containing text, screenshot, diagram, font&#10;&#10;Description automatically generated">
-            <a:extLst>
-              <a:ext uri="{FF2B5EF4-FFF2-40B4-BE49-F238E27FC236}">
-                <a16:creationId xmlns:a16="http://schemas.microsoft.com/office/drawing/2014/main" id="{809EA20C-9BBF-FB46-98CA-538F8CC3E994}"/>
+          <p:cNvPr id="8" name="Picture 7" descr="A picture containing text, screenshot, diagram, font&#10;&#10;Description automatically generated">
+            <a:extLst>
+              <a:ext uri="{FF2B5EF4-FFF2-40B4-BE49-F238E27FC236}">
+                <a16:creationId xmlns:a16="http://schemas.microsoft.com/office/drawing/2014/main" id="{B796ADE1-736F-D14E-BCF5-4F4976AA8493}"/>
               </a:ext>
             </a:extLst>
           </p:cNvPr>
@@ -5343,18 +5453,170 @@
         </p:blipFill>
         <p:spPr>
           <a:xfrm>
-            <a:off x="5420286" y="1901125"/>
-            <a:ext cx="5445616" cy="4244788"/>
+            <a:off x="5783356" y="2043952"/>
+            <a:ext cx="5353611" cy="4173071"/>
           </a:xfrm>
           <a:prstGeom prst="rect">
             <a:avLst/>
           </a:prstGeom>
         </p:spPr>
       </p:pic>
+      <p:sp>
+        <p:nvSpPr>
+          <p:cNvPr id="9" name="TextBox 8">
+            <a:extLst>
+              <a:ext uri="{FF2B5EF4-FFF2-40B4-BE49-F238E27FC236}">
+                <a16:creationId xmlns:a16="http://schemas.microsoft.com/office/drawing/2014/main" id="{C06E25FD-82CE-DC4D-A9E0-F714EF28FA38}"/>
+              </a:ext>
+            </a:extLst>
+          </p:cNvPr>
+          <p:cNvSpPr txBox="1"/>
+          <p:nvPr/>
+        </p:nvSpPr>
+        <p:spPr>
+          <a:xfrm>
+            <a:off x="959223" y="2801063"/>
+            <a:ext cx="5136777" cy="1200329"/>
+          </a:xfrm>
+          <a:prstGeom prst="rect">
+            <a:avLst/>
+          </a:prstGeom>
+          <a:noFill/>
+        </p:spPr>
+        <p:txBody>
+          <a:bodyPr wrap="square" rtlCol="0">
+            <a:spAutoFit/>
+          </a:bodyPr>
+          <a:lstStyle/>
+          <a:p>
+            <a:pPr marL="285750" indent="-285750">
+              <a:buFont typeface="Arial" panose="020B0604020202020204" pitchFamily="34" charset="0"/>
+              <a:buChar char="•"/>
+            </a:pPr>
+            <a:r>
+              <a:rPr lang="en-US" dirty="0"/>
+              <a:t>Using the filtered and normalized files</a:t>
+            </a:r>
+          </a:p>
+          <a:p>
+            <a:pPr marL="285750" indent="-285750">
+              <a:buFont typeface="Arial" panose="020B0604020202020204" pitchFamily="34" charset="0"/>
+              <a:buChar char="•"/>
+            </a:pPr>
+            <a:r>
+              <a:rPr lang="en-US" dirty="0"/>
+              <a:t>Normalization to sum per protein (channel ratio)</a:t>
+            </a:r>
+          </a:p>
+          <a:p>
+            <a:pPr marL="285750" indent="-285750">
+              <a:buFont typeface="Arial" panose="020B0604020202020204" pitchFamily="34" charset="0"/>
+              <a:buChar char="•"/>
+            </a:pPr>
+            <a:r>
+              <a:rPr lang="en-US" dirty="0"/>
+              <a:t>Then male and female files were merged </a:t>
+            </a:r>
+          </a:p>
+          <a:p>
+            <a:pPr marL="285750" indent="-285750">
+              <a:buFont typeface="Arial" panose="020B0604020202020204" pitchFamily="34" charset="0"/>
+              <a:buChar char="•"/>
+            </a:pPr>
+            <a:r>
+              <a:rPr lang="en-US" dirty="0"/>
+              <a:t>And PCA plot was created </a:t>
+            </a:r>
+          </a:p>
+        </p:txBody>
+      </p:sp>
+      <p:sp>
+        <p:nvSpPr>
+          <p:cNvPr id="10" name="TextBox 9">
+            <a:extLst>
+              <a:ext uri="{FF2B5EF4-FFF2-40B4-BE49-F238E27FC236}">
+                <a16:creationId xmlns:a16="http://schemas.microsoft.com/office/drawing/2014/main" id="{48E9BE6E-037B-FA4F-9890-D7D1D8158C0E}"/>
+              </a:ext>
+            </a:extLst>
+          </p:cNvPr>
+          <p:cNvSpPr txBox="1"/>
+          <p:nvPr/>
+        </p:nvSpPr>
+        <p:spPr>
+          <a:xfrm>
+            <a:off x="1055033" y="4778188"/>
+            <a:ext cx="3696268" cy="923330"/>
+          </a:xfrm>
+          <a:prstGeom prst="rect">
+            <a:avLst/>
+          </a:prstGeom>
+          <a:noFill/>
+        </p:spPr>
+        <p:txBody>
+          <a:bodyPr wrap="none" rtlCol="0">
+            <a:spAutoFit/>
+          </a:bodyPr>
+          <a:lstStyle/>
+          <a:p>
+            <a:r>
+              <a:rPr lang="en-US" dirty="0">
+                <a:solidFill>
+                  <a:srgbClr val="1D1C1D"/>
+                </a:solidFill>
+                <a:latin typeface="Slack-Lato"/>
+              </a:rPr>
+              <a:t>Proteins detected in male file: </a:t>
+            </a:r>
+            <a:r>
+              <a:rPr lang="en-US" b="0" i="0" dirty="0">
+                <a:solidFill>
+                  <a:srgbClr val="1D1C1D"/>
+                </a:solidFill>
+                <a:effectLst/>
+                <a:latin typeface="Slack-Lato"/>
+              </a:rPr>
+              <a:t>1231 </a:t>
+            </a:r>
+          </a:p>
+          <a:p>
+            <a:r>
+              <a:rPr lang="en-US" dirty="0">
+                <a:solidFill>
+                  <a:srgbClr val="1D1C1D"/>
+                </a:solidFill>
+                <a:latin typeface="Slack-Lato"/>
+              </a:rPr>
+              <a:t>Proteins detected in female file: </a:t>
+            </a:r>
+            <a:r>
+              <a:rPr lang="en-US" b="0" i="0" dirty="0">
+                <a:solidFill>
+                  <a:srgbClr val="1D1C1D"/>
+                </a:solidFill>
+                <a:effectLst/>
+                <a:latin typeface="Slack-Lato"/>
+              </a:rPr>
+              <a:t>1297</a:t>
+            </a:r>
+          </a:p>
+          <a:p>
+            <a:r>
+              <a:rPr lang="en-US" dirty="0">
+                <a:solidFill>
+                  <a:srgbClr val="1D1C1D"/>
+                </a:solidFill>
+                <a:latin typeface="Slack-Lato"/>
+              </a:rPr>
+              <a:t>Only ~300 overlap</a:t>
+            </a:r>
+            <a:endParaRPr lang="en-US" dirty="0"/>
+          </a:p>
+        </p:txBody>
+      </p:sp>
     </p:spTree>
     <p:extLst>
       <p:ext uri="{BB962C8B-B14F-4D97-AF65-F5344CB8AC3E}">
-        <p14:creationId xmlns:p14="http://schemas.microsoft.com/office/powerpoint/2010/main" val="2307313793"/>
+        <p14:creationId xmlns:p14="http://schemas.microsoft.com/office/powerpoint/2010/main" val="2578833854"/>
       </p:ext>
     </p:extLst>
   </p:cSld>
@@ -5386,7 +5648,7 @@
           <p:cNvPr id="2" name="Title 1">
             <a:extLst>
               <a:ext uri="{FF2B5EF4-FFF2-40B4-BE49-F238E27FC236}">
-                <a16:creationId xmlns:a16="http://schemas.microsoft.com/office/drawing/2014/main" id="{BD9F6F5A-B167-A24D-996B-C74247254113}"/>
+                <a16:creationId xmlns:a16="http://schemas.microsoft.com/office/drawing/2014/main" id="{DC3E266E-17D6-0746-8DA4-D136C48A67D1}"/>
               </a:ext>
             </a:extLst>
           </p:cNvPr>
@@ -5413,21 +5675,215 @@
           </a:p>
         </p:txBody>
       </p:sp>
+      <p:sp>
+        <p:nvSpPr>
+          <p:cNvPr id="4" name="Slide Number Placeholder 3">
+            <a:extLst>
+              <a:ext uri="{FF2B5EF4-FFF2-40B4-BE49-F238E27FC236}">
+                <a16:creationId xmlns:a16="http://schemas.microsoft.com/office/drawing/2014/main" id="{0CC47C58-9948-2D4E-804B-B258395A3BBB}"/>
+              </a:ext>
+            </a:extLst>
+          </p:cNvPr>
+          <p:cNvSpPr>
+            <a:spLocks noGrp="1"/>
+          </p:cNvSpPr>
+          <p:nvPr>
+            <p:ph type="sldNum" sz="quarter" idx="12"/>
+          </p:nvPr>
+        </p:nvSpPr>
+        <p:spPr/>
+        <p:txBody>
+          <a:bodyPr/>
+          <a:lstStyle/>
+          <a:p>
+            <a:fld id="{1621B6DD-29C1-4FEA-923F-71EA1347694C}" type="slidenum">
+              <a:rPr lang="en-US" smtClean="0"/>
+              <a:t>12</a:t>
+            </a:fld>
+            <a:endParaRPr lang="en-US"/>
+          </a:p>
+        </p:txBody>
+      </p:sp>
+      <p:sp>
+        <p:nvSpPr>
+          <p:cNvPr id="9" name="TextBox 8">
+            <a:extLst>
+              <a:ext uri="{FF2B5EF4-FFF2-40B4-BE49-F238E27FC236}">
+                <a16:creationId xmlns:a16="http://schemas.microsoft.com/office/drawing/2014/main" id="{C06E25FD-82CE-DC4D-A9E0-F714EF28FA38}"/>
+              </a:ext>
+            </a:extLst>
+          </p:cNvPr>
+          <p:cNvSpPr txBox="1"/>
+          <p:nvPr/>
+        </p:nvSpPr>
+        <p:spPr>
+          <a:xfrm>
+            <a:off x="838200" y="2823190"/>
+            <a:ext cx="5252391" cy="1200329"/>
+          </a:xfrm>
+          <a:prstGeom prst="rect">
+            <a:avLst/>
+          </a:prstGeom>
+          <a:noFill/>
+        </p:spPr>
+        <p:txBody>
+          <a:bodyPr wrap="square" rtlCol="0">
+            <a:spAutoFit/>
+          </a:bodyPr>
+          <a:lstStyle/>
+          <a:p>
+            <a:pPr marL="285750" indent="-285750">
+              <a:buFont typeface="Arial" panose="020B0604020202020204" pitchFamily="34" charset="0"/>
+              <a:buChar char="•"/>
+            </a:pPr>
+            <a:r>
+              <a:rPr lang="en-US" dirty="0"/>
+              <a:t>Using filtered, normalized and roc result</a:t>
+            </a:r>
+          </a:p>
+          <a:p>
+            <a:pPr marL="285750" indent="-285750">
+              <a:buFont typeface="Arial" panose="020B0604020202020204" pitchFamily="34" charset="0"/>
+              <a:buChar char="•"/>
+            </a:pPr>
+            <a:r>
+              <a:rPr lang="en-US" dirty="0"/>
+              <a:t>Normalization to sum per protein (channel ratio)</a:t>
+            </a:r>
+          </a:p>
+          <a:p>
+            <a:pPr marL="285750" indent="-285750">
+              <a:buFont typeface="Arial" panose="020B0604020202020204" pitchFamily="34" charset="0"/>
+              <a:buChar char="•"/>
+            </a:pPr>
+            <a:r>
+              <a:rPr lang="en-US" dirty="0"/>
+              <a:t>Then male and female files were merged </a:t>
+            </a:r>
+          </a:p>
+          <a:p>
+            <a:pPr marL="285750" indent="-285750">
+              <a:buFont typeface="Arial" panose="020B0604020202020204" pitchFamily="34" charset="0"/>
+              <a:buChar char="•"/>
+            </a:pPr>
+            <a:r>
+              <a:rPr lang="en-US" dirty="0"/>
+              <a:t>And PCA plot was created </a:t>
+            </a:r>
+          </a:p>
+        </p:txBody>
+      </p:sp>
+      <p:sp>
+        <p:nvSpPr>
+          <p:cNvPr id="10" name="TextBox 9">
+            <a:extLst>
+              <a:ext uri="{FF2B5EF4-FFF2-40B4-BE49-F238E27FC236}">
+                <a16:creationId xmlns:a16="http://schemas.microsoft.com/office/drawing/2014/main" id="{48E9BE6E-037B-FA4F-9890-D7D1D8158C0E}"/>
+              </a:ext>
+            </a:extLst>
+          </p:cNvPr>
+          <p:cNvSpPr txBox="1"/>
+          <p:nvPr/>
+        </p:nvSpPr>
+        <p:spPr>
+          <a:xfrm>
+            <a:off x="1034012" y="4641554"/>
+            <a:ext cx="3696268" cy="1200329"/>
+          </a:xfrm>
+          <a:prstGeom prst="rect">
+            <a:avLst/>
+          </a:prstGeom>
+          <a:noFill/>
+        </p:spPr>
+        <p:txBody>
+          <a:bodyPr wrap="none" rtlCol="0">
+            <a:spAutoFit/>
+          </a:bodyPr>
+          <a:lstStyle/>
+          <a:p>
+            <a:r>
+              <a:rPr lang="en-US" dirty="0">
+                <a:solidFill>
+                  <a:srgbClr val="1D1C1D"/>
+                </a:solidFill>
+                <a:latin typeface="Slack-Lato"/>
+              </a:rPr>
+              <a:t>Proteins detected in male file: </a:t>
+            </a:r>
+            <a:r>
+              <a:rPr lang="en-US" b="0" i="0" dirty="0">
+                <a:solidFill>
+                  <a:srgbClr val="1D1C1D"/>
+                </a:solidFill>
+                <a:effectLst/>
+                <a:latin typeface="Slack-Lato"/>
+              </a:rPr>
+              <a:t>745 </a:t>
+            </a:r>
+          </a:p>
+          <a:p>
+            <a:r>
+              <a:rPr lang="en-US" dirty="0">
+                <a:solidFill>
+                  <a:srgbClr val="1D1C1D"/>
+                </a:solidFill>
+                <a:latin typeface="Slack-Lato"/>
+              </a:rPr>
+              <a:t>Proteins detected in female file: </a:t>
+            </a:r>
+            <a:r>
+              <a:rPr lang="en-US" b="0" i="0" dirty="0">
+                <a:solidFill>
+                  <a:srgbClr val="1D1C1D"/>
+                </a:solidFill>
+                <a:effectLst/>
+                <a:latin typeface="Slack-Lato"/>
+              </a:rPr>
+              <a:t>1011</a:t>
+            </a:r>
+          </a:p>
+          <a:p>
+            <a:r>
+              <a:rPr lang="en-US" dirty="0">
+                <a:solidFill>
+                  <a:srgbClr val="1D1C1D"/>
+                </a:solidFill>
+                <a:latin typeface="Slack-Lato"/>
+              </a:rPr>
+              <a:t>Only ~300 overlap</a:t>
+            </a:r>
+          </a:p>
+          <a:p>
+            <a:r>
+              <a:rPr lang="en-US" dirty="0">
+                <a:solidFill>
+                  <a:srgbClr val="FF0000"/>
+                </a:solidFill>
+                <a:latin typeface="Slack-Lato"/>
+              </a:rPr>
+              <a:t>And 170 overlap after ROC </a:t>
+            </a:r>
+            <a:endParaRPr lang="en-US" dirty="0">
+              <a:solidFill>
+                <a:srgbClr val="FF0000"/>
+              </a:solidFill>
+            </a:endParaRPr>
+          </a:p>
+        </p:txBody>
+      </p:sp>
       <p:pic>
         <p:nvPicPr>
-          <p:cNvPr id="6" name="Content Placeholder 5" descr="A screenshot of a graph&#10;&#10;Description automatically generated with low confidence">
-            <a:extLst>
-              <a:ext uri="{FF2B5EF4-FFF2-40B4-BE49-F238E27FC236}">
-                <a16:creationId xmlns:a16="http://schemas.microsoft.com/office/drawing/2014/main" id="{4E4B9A7B-8296-024F-89FA-D3CC71FA811A}"/>
+          <p:cNvPr id="5" name="Picture 4" descr="A picture containing text, screenshot, diagram, font&#10;&#10;Description automatically generated">
+            <a:extLst>
+              <a:ext uri="{FF2B5EF4-FFF2-40B4-BE49-F238E27FC236}">
+                <a16:creationId xmlns:a16="http://schemas.microsoft.com/office/drawing/2014/main" id="{809EA20C-9BBF-FB46-98CA-538F8CC3E994}"/>
               </a:ext>
             </a:extLst>
           </p:cNvPr>
           <p:cNvPicPr>
-            <a:picLocks noGrp="1" noChangeAspect="1"/>
+            <a:picLocks noChangeAspect="1"/>
           </p:cNvPicPr>
-          <p:nvPr>
-            <p:ph idx="1"/>
-          </p:nvPr>
+          <p:nvPr/>
         </p:nvPicPr>
         <p:blipFill>
           <a:blip r:embed="rId2"/>
@@ -5437,7 +5893,101 @@
         </p:blipFill>
         <p:spPr>
           <a:xfrm>
-            <a:off x="3684495" y="1805504"/>
+            <a:off x="5908184" y="1995718"/>
+            <a:ext cx="5445616" cy="4244788"/>
+          </a:xfrm>
+          <a:prstGeom prst="rect">
+            <a:avLst/>
+          </a:prstGeom>
+        </p:spPr>
+      </p:pic>
+    </p:spTree>
+    <p:extLst>
+      <p:ext uri="{BB962C8B-B14F-4D97-AF65-F5344CB8AC3E}">
+        <p14:creationId xmlns:p14="http://schemas.microsoft.com/office/powerpoint/2010/main" val="2307313793"/>
+      </p:ext>
+    </p:extLst>
+  </p:cSld>
+  <p:clrMapOvr>
+    <a:masterClrMapping/>
+  </p:clrMapOvr>
+</p:sld>
+</file>
+
+<file path=ppt/slides/slide14.xml><?xml version="1.0" encoding="utf-8"?>
+<p:sld xmlns:a="http://schemas.openxmlformats.org/drawingml/2006/main" xmlns:r="http://schemas.openxmlformats.org/officeDocument/2006/relationships" xmlns:p="http://schemas.openxmlformats.org/presentationml/2006/main">
+  <p:cSld>
+    <p:spTree>
+      <p:nvGrpSpPr>
+        <p:cNvPr id="1" name=""/>
+        <p:cNvGrpSpPr/>
+        <p:nvPr/>
+      </p:nvGrpSpPr>
+      <p:grpSpPr>
+        <a:xfrm>
+          <a:off x="0" y="0"/>
+          <a:ext cx="0" cy="0"/>
+          <a:chOff x="0" y="0"/>
+          <a:chExt cx="0" cy="0"/>
+        </a:xfrm>
+      </p:grpSpPr>
+      <p:sp>
+        <p:nvSpPr>
+          <p:cNvPr id="2" name="Title 1">
+            <a:extLst>
+              <a:ext uri="{FF2B5EF4-FFF2-40B4-BE49-F238E27FC236}">
+                <a16:creationId xmlns:a16="http://schemas.microsoft.com/office/drawing/2014/main" id="{BD9F6F5A-B167-A24D-996B-C74247254113}"/>
+              </a:ext>
+            </a:extLst>
+          </p:cNvPr>
+          <p:cNvSpPr>
+            <a:spLocks noGrp="1"/>
+          </p:cNvSpPr>
+          <p:nvPr>
+            <p:ph type="title"/>
+          </p:nvPr>
+        </p:nvSpPr>
+        <p:spPr/>
+        <p:txBody>
+          <a:bodyPr/>
+          <a:lstStyle/>
+          <a:p>
+            <a:r>
+              <a:rPr lang="en-US" b="1" dirty="0">
+                <a:latin typeface="Times New Roman" panose="02020603050405020304" pitchFamily="18" charset="0"/>
+                <a:cs typeface="Times New Roman" panose="02020603050405020304" pitchFamily="18" charset="0"/>
+              </a:rPr>
+              <a:t>20230512_EV2-28A (male) vs. 20230513_EV2-28B (female) </a:t>
+            </a:r>
+            <a:endParaRPr lang="en-US" dirty="0"/>
+          </a:p>
+        </p:txBody>
+      </p:sp>
+      <p:pic>
+        <p:nvPicPr>
+          <p:cNvPr id="6" name="Content Placeholder 5" descr="A screenshot of a graph&#10;&#10;Description automatically generated with low confidence">
+            <a:extLst>
+              <a:ext uri="{FF2B5EF4-FFF2-40B4-BE49-F238E27FC236}">
+                <a16:creationId xmlns:a16="http://schemas.microsoft.com/office/drawing/2014/main" id="{4E4B9A7B-8296-024F-89FA-D3CC71FA811A}"/>
+              </a:ext>
+            </a:extLst>
+          </p:cNvPr>
+          <p:cNvPicPr>
+            <a:picLocks noGrp="1" noChangeAspect="1"/>
+          </p:cNvPicPr>
+          <p:nvPr>
+            <p:ph idx="1"/>
+          </p:nvPr>
+        </p:nvPicPr>
+        <p:blipFill>
+          <a:blip r:embed="rId2"/>
+          <a:stretch>
+            <a:fillRect/>
+          </a:stretch>
+        </p:blipFill>
+        <p:spPr>
+          <a:xfrm>
+            <a:off x="5097660" y="1805504"/>
             <a:ext cx="5746376" cy="4733408"/>
           </a:xfrm>
         </p:spPr>
@@ -5465,7 +6015,7 @@
           <a:p>
             <a:fld id="{1621B6DD-29C1-4FEA-923F-71EA1347694C}" type="slidenum">
               <a:rPr lang="en-US" smtClean="0"/>
-              <a:t>12</a:t>
+              <a:t>13</a:t>
             </a:fld>
             <a:endParaRPr lang="en-US"/>
           </a:p>
@@ -6092,6 +6642,41 @@
           </a:prstGeom>
         </p:spPr>
       </p:pic>
+      <p:sp>
+        <p:nvSpPr>
+          <p:cNvPr id="3" name="TextBox 2">
+            <a:extLst>
+              <a:ext uri="{FF2B5EF4-FFF2-40B4-BE49-F238E27FC236}">
+                <a16:creationId xmlns:a16="http://schemas.microsoft.com/office/drawing/2014/main" id="{02A4CBD5-A85F-C14C-80D0-CC484D8BCB74}"/>
+              </a:ext>
+            </a:extLst>
+          </p:cNvPr>
+          <p:cNvSpPr txBox="1"/>
+          <p:nvPr/>
+        </p:nvSpPr>
+        <p:spPr>
+          <a:xfrm>
+            <a:off x="535917" y="4540468"/>
+            <a:ext cx="3735491" cy="1815882"/>
+          </a:xfrm>
+          <a:prstGeom prst="rect">
+            <a:avLst/>
+          </a:prstGeom>
+          <a:noFill/>
+        </p:spPr>
+        <p:txBody>
+          <a:bodyPr wrap="square" rtlCol="0">
+            <a:spAutoFit/>
+          </a:bodyPr>
+          <a:lstStyle/>
+          <a:p>
+            <a:r>
+              <a:rPr lang="en-US" sz="1600" dirty="0"/>
+              <a:t>Z-score: statistical measurement that describes a value's relationship to the mean of a group of values, Z-score is measured in terms of standard deviations from the mean. If a Z-score is 0, it indicates that the data point's score is identical to the mean score</a:t>
+            </a:r>
+          </a:p>
+        </p:txBody>
+      </p:sp>
     </p:spTree>
     <p:extLst>
       <p:ext uri="{BB962C8B-B14F-4D97-AF65-F5344CB8AC3E}">
@@ -6216,7 +6801,7 @@
           <p:nvPr/>
         </p:nvPicPr>
         <p:blipFill>
-          <a:blip r:embed="rId2"/>
+          <a:blip r:embed="rId3"/>
           <a:stretch>
             <a:fillRect/>
           </a:stretch>
@@ -6351,14 +6936,14 @@
           <p:nvPr/>
         </p:nvPicPr>
         <p:blipFill>
-          <a:blip r:embed="rId3"/>
+          <a:blip r:embed="rId4"/>
           <a:stretch>
             <a:fillRect/>
           </a:stretch>
         </p:blipFill>
         <p:spPr>
           <a:xfrm>
-            <a:off x="580566" y="2930877"/>
+            <a:off x="734902" y="2539674"/>
             <a:ext cx="7255246" cy="2201841"/>
           </a:xfrm>
           <a:prstGeom prst="rect">
@@ -6380,7 +6965,7 @@
         </p:nvSpPr>
         <p:spPr>
           <a:xfrm>
-            <a:off x="3841935" y="2561545"/>
+            <a:off x="4117722" y="2159128"/>
             <a:ext cx="732508" cy="369332"/>
           </a:xfrm>
           <a:prstGeom prst="rect">
@@ -6398,6 +6983,104 @@
               <a:rPr lang="en-US" dirty="0"/>
               <a:t>Table </a:t>
             </a:r>
+          </a:p>
+        </p:txBody>
+      </p:sp>
+      <p:sp>
+        <p:nvSpPr>
+          <p:cNvPr id="3" name="TextBox 2">
+            <a:extLst>
+              <a:ext uri="{FF2B5EF4-FFF2-40B4-BE49-F238E27FC236}">
+                <a16:creationId xmlns:a16="http://schemas.microsoft.com/office/drawing/2014/main" id="{B0B6E13E-90FF-8C49-A451-70B68D45392F}"/>
+              </a:ext>
+            </a:extLst>
+          </p:cNvPr>
+          <p:cNvSpPr txBox="1"/>
+          <p:nvPr/>
+        </p:nvSpPr>
+        <p:spPr>
+          <a:xfrm>
+            <a:off x="651009" y="4937991"/>
+            <a:ext cx="7108893" cy="1477328"/>
+          </a:xfrm>
+          <a:prstGeom prst="rect">
+            <a:avLst/>
+          </a:prstGeom>
+          <a:noFill/>
+        </p:spPr>
+        <p:txBody>
+          <a:bodyPr wrap="square" rtlCol="0">
+            <a:spAutoFit/>
+          </a:bodyPr>
+          <a:lstStyle/>
+          <a:p>
+            <a:pPr algn="just"/>
+            <a:endParaRPr lang="en-US" sz="1500" dirty="0"/>
+          </a:p>
+          <a:p>
+            <a:pPr algn="just"/>
+            <a:r>
+              <a:rPr lang="en-US" sz="1500" dirty="0"/>
+              <a:t>Background gene set: all mouse protein-coding genes OR experiment specific genes</a:t>
+            </a:r>
+          </a:p>
+          <a:p>
+            <a:pPr algn="just"/>
+            <a:endParaRPr lang="en-US" sz="1500" dirty="0"/>
+          </a:p>
+          <a:p>
+            <a:pPr algn="just"/>
+            <a:r>
+              <a:rPr lang="en-US" sz="1500" dirty="0"/>
+              <a:t>GOEA analysis was performed on the significant up or down regulated proteins (mapped to gene IDs). Enriched ontologies with a </a:t>
+            </a:r>
+            <a:r>
+              <a:rPr lang="en-US" sz="1500" dirty="0" err="1"/>
+              <a:t>Benjamini</a:t>
+            </a:r>
+            <a:r>
+              <a:rPr lang="en-US" sz="1500" dirty="0"/>
+              <a:t>-Hochberg-corrected p-value less than 0.05 were retained and top 10 terms were plotted. </a:t>
+            </a:r>
+            <a:endParaRPr lang="en-US" dirty="0"/>
+          </a:p>
+        </p:txBody>
+      </p:sp>
+      <p:sp>
+        <p:nvSpPr>
+          <p:cNvPr id="5" name="TextBox 4">
+            <a:extLst>
+              <a:ext uri="{FF2B5EF4-FFF2-40B4-BE49-F238E27FC236}">
+                <a16:creationId xmlns:a16="http://schemas.microsoft.com/office/drawing/2014/main" id="{E80DC593-5F0B-814A-8AE8-8F7AC22AC9A0}"/>
+              </a:ext>
+            </a:extLst>
+          </p:cNvPr>
+          <p:cNvSpPr txBox="1"/>
+          <p:nvPr/>
+        </p:nvSpPr>
+        <p:spPr>
+          <a:xfrm>
+            <a:off x="838200" y="1495118"/>
+            <a:ext cx="6252353" cy="600164"/>
+          </a:xfrm>
+          <a:prstGeom prst="rect">
+            <a:avLst/>
+          </a:prstGeom>
+          <a:noFill/>
+        </p:spPr>
+        <p:txBody>
+          <a:bodyPr wrap="none" rtlCol="0">
+            <a:spAutoFit/>
+          </a:bodyPr>
+          <a:lstStyle/>
+          <a:p>
+            <a:r>
+              <a:rPr lang="en-US" sz="1500" dirty="0"/>
+              <a:t>Gene Ontology Enrichment Analysis (GOEA) was performed using GOATOOLS. </a:t>
+            </a:r>
+          </a:p>
+          <a:p>
+            <a:endParaRPr lang="en-US" dirty="0"/>
           </a:p>
         </p:txBody>
       </p:sp>
@@ -7151,6 +7834,45 @@
               <a:t>iWAT_chow</a:t>
             </a:r>
             <a:endParaRPr lang="en-US" dirty="0"/>
+          </a:p>
+        </p:txBody>
+      </p:sp>
+      <p:sp>
+        <p:nvSpPr>
+          <p:cNvPr id="11" name="TextBox 10">
+            <a:extLst>
+              <a:ext uri="{FF2B5EF4-FFF2-40B4-BE49-F238E27FC236}">
+                <a16:creationId xmlns:a16="http://schemas.microsoft.com/office/drawing/2014/main" id="{B126C3BE-2CBD-BC4F-A2A1-72EA81250D86}"/>
+              </a:ext>
+            </a:extLst>
+          </p:cNvPr>
+          <p:cNvSpPr txBox="1"/>
+          <p:nvPr/>
+        </p:nvSpPr>
+        <p:spPr>
+          <a:xfrm>
+            <a:off x="2330030" y="4452000"/>
+            <a:ext cx="2903524" cy="369332"/>
+          </a:xfrm>
+          <a:prstGeom prst="rect">
+            <a:avLst/>
+          </a:prstGeom>
+          <a:noFill/>
+        </p:spPr>
+        <p:txBody>
+          <a:bodyPr wrap="square" rtlCol="0">
+            <a:spAutoFit/>
+          </a:bodyPr>
+          <a:lstStyle/>
+          <a:p>
+            <a:r>
+              <a:rPr lang="en-US" dirty="0">
+                <a:solidFill>
+                  <a:srgbClr val="FF0000"/>
+                </a:solidFill>
+              </a:rPr>
+              <a:t>Nothing passed FDR &lt;0.05 </a:t>
+            </a:r>
           </a:p>
         </p:txBody>
       </p:sp>
@@ -7886,6 +8608,45 @@
             <a:r>
               <a:rPr lang="en-US" dirty="0"/>
               <a:t>LPS vs ctrl </a:t>
+            </a:r>
+          </a:p>
+        </p:txBody>
+      </p:sp>
+      <p:sp>
+        <p:nvSpPr>
+          <p:cNvPr id="11" name="TextBox 10">
+            <a:extLst>
+              <a:ext uri="{FF2B5EF4-FFF2-40B4-BE49-F238E27FC236}">
+                <a16:creationId xmlns:a16="http://schemas.microsoft.com/office/drawing/2014/main" id="{EA321AE1-D891-6F49-89B2-FE1307862559}"/>
+              </a:ext>
+            </a:extLst>
+          </p:cNvPr>
+          <p:cNvSpPr txBox="1"/>
+          <p:nvPr/>
+        </p:nvSpPr>
+        <p:spPr>
+          <a:xfrm>
+            <a:off x="2200721" y="4262241"/>
+            <a:ext cx="2903524" cy="369332"/>
+          </a:xfrm>
+          <a:prstGeom prst="rect">
+            <a:avLst/>
+          </a:prstGeom>
+          <a:noFill/>
+        </p:spPr>
+        <p:txBody>
+          <a:bodyPr wrap="square" rtlCol="0">
+            <a:spAutoFit/>
+          </a:bodyPr>
+          <a:lstStyle/>
+          <a:p>
+            <a:r>
+              <a:rPr lang="en-US" dirty="0">
+                <a:solidFill>
+                  <a:srgbClr val="FF0000"/>
+                </a:solidFill>
+              </a:rPr>
+              <a:t>Nothing passed FDR &lt;0.05 </a:t>
             </a:r>
           </a:p>
         </p:txBody>

--- a/docs/update_052523.pptx
+++ b/docs/update_052523.pptx
@@ -210,7 +210,7 @@
           <a:p>
             <a:fld id="{5D91BF4D-3201-F745-B932-E7F786B71255}" type="datetimeFigureOut">
               <a:rPr lang="en-US" smtClean="0"/>
-              <a:t>5/26/23</a:t>
+              <a:t>5/31/23</a:t>
             </a:fld>
             <a:endParaRPr lang="en-US"/>
           </a:p>
@@ -564,7 +564,7 @@
             </a:r>
             <a:r>
               <a:rPr lang="en-US" sz="1200" dirty="0"/>
-              <a:t> function. Human GO associations were then selected and stored as a list of named tuples using the call ‘</a:t>
+              <a:t> function. Mouse GO associations were then selected and stored as a list of named tuples using the call ‘</a:t>
             </a:r>
             <a:r>
               <a:rPr lang="en-US" sz="1200" dirty="0" err="1"/>
@@ -763,7 +763,7 @@
           <a:p>
             <a:fld id="{4D82D62B-C5BC-9A48-B649-B612C2626DF0}" type="datetime2">
               <a:rPr lang="en-US" smtClean="0"/>
-              <a:t>Friday, May 26, 2023</a:t>
+              <a:t>Wednesday, May 31, 2023</a:t>
             </a:fld>
             <a:endParaRPr lang="en-US" dirty="0"/>
           </a:p>
@@ -966,7 +966,7 @@
           <a:p>
             <a:fld id="{8C7BF22D-4351-7443-9203-BE328953BFC7}" type="datetime2">
               <a:rPr lang="en-US" smtClean="0"/>
-              <a:t>Friday, May 26, 2023</a:t>
+              <a:t>Wednesday, May 31, 2023</a:t>
             </a:fld>
             <a:endParaRPr lang="en-US"/>
           </a:p>
@@ -1177,7 +1177,7 @@
           <a:p>
             <a:fld id="{9FDF6349-9520-004C-B410-2193F9372E49}" type="datetime2">
               <a:rPr lang="en-US" smtClean="0"/>
-              <a:t>Friday, May 26, 2023</a:t>
+              <a:t>Wednesday, May 31, 2023</a:t>
             </a:fld>
             <a:endParaRPr lang="en-US"/>
           </a:p>
@@ -1378,7 +1378,7 @@
           <a:p>
             <a:fld id="{E9A10DC3-F6B5-014A-A9AD-0D47C6506BAB}" type="datetime2">
               <a:rPr lang="en-US" smtClean="0"/>
-              <a:t>Friday, May 26, 2023</a:t>
+              <a:t>Wednesday, May 31, 2023</a:t>
             </a:fld>
             <a:endParaRPr lang="en-US" dirty="0"/>
           </a:p>
@@ -1658,7 +1658,7 @@
           <a:p>
             <a:fld id="{A049C287-8CF4-DC48-88B8-6E35669697EC}" type="datetime2">
               <a:rPr lang="en-US" smtClean="0"/>
-              <a:t>Friday, May 26, 2023</a:t>
+              <a:t>Wednesday, May 31, 2023</a:t>
             </a:fld>
             <a:endParaRPr lang="en-US"/>
           </a:p>
@@ -1928,7 +1928,7 @@
           <a:p>
             <a:fld id="{ADEB5C39-7764-3744-BF89-1BA0C95D9B94}" type="datetime2">
               <a:rPr lang="en-US" smtClean="0"/>
-              <a:t>Friday, May 26, 2023</a:t>
+              <a:t>Wednesday, May 31, 2023</a:t>
             </a:fld>
             <a:endParaRPr lang="en-US"/>
           </a:p>
@@ -2343,7 +2343,7 @@
           <a:p>
             <a:fld id="{4BAB7099-C23E-1745-AF03-0B0C40F6AA6C}" type="datetime2">
               <a:rPr lang="en-US" smtClean="0"/>
-              <a:t>Friday, May 26, 2023</a:t>
+              <a:t>Wednesday, May 31, 2023</a:t>
             </a:fld>
             <a:endParaRPr lang="en-US"/>
           </a:p>
@@ -2487,7 +2487,7 @@
           <a:p>
             <a:fld id="{52B883A0-F701-0F49-9D67-42F97F0F4C65}" type="datetime2">
               <a:rPr lang="en-US" smtClean="0"/>
-              <a:t>Friday, May 26, 2023</a:t>
+              <a:t>Wednesday, May 31, 2023</a:t>
             </a:fld>
             <a:endParaRPr lang="en-US"/>
           </a:p>
@@ -2603,7 +2603,7 @@
           <a:p>
             <a:fld id="{E6923127-F9F8-8B4E-9CEB-95BF7FFEA85F}" type="datetime2">
               <a:rPr lang="en-US" smtClean="0"/>
-              <a:t>Friday, May 26, 2023</a:t>
+              <a:t>Wednesday, May 31, 2023</a:t>
             </a:fld>
             <a:endParaRPr lang="en-US"/>
           </a:p>
@@ -2917,7 +2917,7 @@
           <a:p>
             <a:fld id="{24AFEB34-53E9-8F42-9ED2-04274EE70207}" type="datetime2">
               <a:rPr lang="en-US" smtClean="0"/>
-              <a:t>Friday, May 26, 2023</a:t>
+              <a:t>Wednesday, May 31, 2023</a:t>
             </a:fld>
             <a:endParaRPr lang="en-US"/>
           </a:p>
@@ -3208,7 +3208,7 @@
           <a:p>
             <a:fld id="{78864A2C-3282-224A-8A3B-B1B48911DC1D}" type="datetime2">
               <a:rPr lang="en-US" smtClean="0"/>
-              <a:t>Friday, May 26, 2023</a:t>
+              <a:t>Wednesday, May 31, 2023</a:t>
             </a:fld>
             <a:endParaRPr lang="en-US"/>
           </a:p>
@@ -3452,7 +3452,7 @@
           <a:p>
             <a:fld id="{6A398F71-50EE-C442-9A03-D3A19758747B}" type="datetime2">
               <a:rPr lang="en-US" smtClean="0"/>
-              <a:t>Friday, May 26, 2023</a:t>
+              <a:t>Wednesday, May 31, 2023</a:t>
             </a:fld>
             <a:endParaRPr lang="en-US" dirty="0"/>
           </a:p>
